--- a/docs/Презентация.pptx
+++ b/docs/Презентация.pptx
@@ -9674,10 +9674,10 @@
       </p:sp>
       <p:pic>
         <p:nvPicPr>
-          <p:cNvPr id="4" name="Рисунок 3">
+          <p:cNvPr id="3" name="Рисунок 2">
             <a:extLst>
               <a:ext uri="{FF2B5EF4-FFF2-40B4-BE49-F238E27FC236}">
-                <a16:creationId xmlns:a16="http://schemas.microsoft.com/office/drawing/2014/main" id="{DB3197DF-69A4-08C8-7230-6F5AC31B3ECF}"/>
+                <a16:creationId xmlns:a16="http://schemas.microsoft.com/office/drawing/2014/main" id="{A28DC938-25A6-88A1-4EA2-0C47CBCA9E13}"/>
               </a:ext>
             </a:extLst>
           </p:cNvPr>
@@ -9694,8 +9694,8 @@
         </p:blipFill>
         <p:spPr>
           <a:xfrm>
-            <a:off x="0" y="1407402"/>
-            <a:ext cx="9144000" cy="1968696"/>
+            <a:off x="0" y="596911"/>
+            <a:ext cx="9144000" cy="3949677"/>
           </a:xfrm>
           <a:prstGeom prst="rect">
             <a:avLst/>
@@ -14926,10 +14926,10 @@
       </p:sp>
       <p:pic>
         <p:nvPicPr>
-          <p:cNvPr id="3" name="Рисунок 2">
+          <p:cNvPr id="4" name="Рисунок 3">
             <a:extLst>
               <a:ext uri="{FF2B5EF4-FFF2-40B4-BE49-F238E27FC236}">
-                <a16:creationId xmlns:a16="http://schemas.microsoft.com/office/drawing/2014/main" id="{14CABD1E-4A5A-8FF9-419D-60A66F805D7D}"/>
+                <a16:creationId xmlns:a16="http://schemas.microsoft.com/office/drawing/2014/main" id="{D63FA783-11D8-BD16-C4B4-E47B8F1B7882}"/>
               </a:ext>
             </a:extLst>
           </p:cNvPr>
@@ -14946,8 +14946,8 @@
         </p:blipFill>
         <p:spPr>
           <a:xfrm>
-            <a:off x="500550" y="1089887"/>
-            <a:ext cx="7767798" cy="3129313"/>
+            <a:off x="0" y="1028418"/>
+            <a:ext cx="9144000" cy="3086664"/>
           </a:xfrm>
           <a:prstGeom prst="rect">
             <a:avLst/>
